--- a/hub-next/public/research/Gimlet_Labs_Deal_Draft.pptx
+++ b/hub-next/public/research/Gimlet_Labs_Deal_Draft.pptx
@@ -210,7 +210,7 @@
           <a:p>
             <a:fld id="{0301B205-89CD-41EB-8602-93345E461546}" type="datetimeFigureOut">
               <a:rPr lang="en-US" smtClean="0"/>
-              <a:t>6/19/26</a:t>
+              <a:t>7/1/26</a:t>
             </a:fld>
             <a:endParaRPr lang="en-US"/>
           </a:p>
@@ -824,7 +824,7 @@
           <a:p>
             <a:fld id="{5BCAD085-E8A6-8845-BD4E-CB4CCA059FC4}" type="datetimeFigureOut">
               <a:rPr lang="en-US" smtClean="0"/>
-              <a:t>6/19/26</a:t>
+              <a:t>7/1/26</a:t>
             </a:fld>
             <a:endParaRPr lang="en-US"/>
           </a:p>
@@ -992,7 +992,7 @@
           <a:p>
             <a:fld id="{5BCAD085-E8A6-8845-BD4E-CB4CCA059FC4}" type="datetimeFigureOut">
               <a:rPr lang="en-US" smtClean="0"/>
-              <a:t>6/19/26</a:t>
+              <a:t>7/1/26</a:t>
             </a:fld>
             <a:endParaRPr lang="en-US"/>
           </a:p>
@@ -1170,7 +1170,7 @@
           <a:p>
             <a:fld id="{5BCAD085-E8A6-8845-BD4E-CB4CCA059FC4}" type="datetimeFigureOut">
               <a:rPr lang="en-US" smtClean="0"/>
-              <a:t>6/19/26</a:t>
+              <a:t>7/1/26</a:t>
             </a:fld>
             <a:endParaRPr lang="en-US"/>
           </a:p>
@@ -1338,7 +1338,7 @@
           <a:p>
             <a:fld id="{5BCAD085-E8A6-8845-BD4E-CB4CCA059FC4}" type="datetimeFigureOut">
               <a:rPr lang="en-US" smtClean="0"/>
-              <a:t>6/19/26</a:t>
+              <a:t>7/1/26</a:t>
             </a:fld>
             <a:endParaRPr lang="en-US"/>
           </a:p>
@@ -1583,7 +1583,7 @@
           <a:p>
             <a:fld id="{5BCAD085-E8A6-8845-BD4E-CB4CCA059FC4}" type="datetimeFigureOut">
               <a:rPr lang="en-US" smtClean="0"/>
-              <a:t>6/19/26</a:t>
+              <a:t>7/1/26</a:t>
             </a:fld>
             <a:endParaRPr lang="en-US"/>
           </a:p>
@@ -1868,7 +1868,7 @@
           <a:p>
             <a:fld id="{5BCAD085-E8A6-8845-BD4E-CB4CCA059FC4}" type="datetimeFigureOut">
               <a:rPr lang="en-US" smtClean="0"/>
-              <a:t>6/19/26</a:t>
+              <a:t>7/1/26</a:t>
             </a:fld>
             <a:endParaRPr lang="en-US"/>
           </a:p>
@@ -2287,7 +2287,7 @@
           <a:p>
             <a:fld id="{5BCAD085-E8A6-8845-BD4E-CB4CCA059FC4}" type="datetimeFigureOut">
               <a:rPr lang="en-US" smtClean="0"/>
-              <a:t>6/19/26</a:t>
+              <a:t>7/1/26</a:t>
             </a:fld>
             <a:endParaRPr lang="en-US"/>
           </a:p>
@@ -2404,7 +2404,7 @@
           <a:p>
             <a:fld id="{5BCAD085-E8A6-8845-BD4E-CB4CCA059FC4}" type="datetimeFigureOut">
               <a:rPr lang="en-US" smtClean="0"/>
-              <a:t>6/19/26</a:t>
+              <a:t>7/1/26</a:t>
             </a:fld>
             <a:endParaRPr lang="en-US"/>
           </a:p>
@@ -2499,7 +2499,7 @@
           <a:p>
             <a:fld id="{5BCAD085-E8A6-8845-BD4E-CB4CCA059FC4}" type="datetimeFigureOut">
               <a:rPr lang="en-US" smtClean="0"/>
-              <a:t>6/19/26</a:t>
+              <a:t>7/1/26</a:t>
             </a:fld>
             <a:endParaRPr lang="en-US"/>
           </a:p>
@@ -2774,7 +2774,7 @@
           <a:p>
             <a:fld id="{5BCAD085-E8A6-8845-BD4E-CB4CCA059FC4}" type="datetimeFigureOut">
               <a:rPr lang="en-US" smtClean="0"/>
-              <a:t>6/19/26</a:t>
+              <a:t>7/1/26</a:t>
             </a:fld>
             <a:endParaRPr lang="en-US"/>
           </a:p>
@@ -3026,7 +3026,7 @@
           <a:p>
             <a:fld id="{5BCAD085-E8A6-8845-BD4E-CB4CCA059FC4}" type="datetimeFigureOut">
               <a:rPr lang="en-US" smtClean="0"/>
-              <a:t>6/19/26</a:t>
+              <a:t>7/1/26</a:t>
             </a:fld>
             <a:endParaRPr lang="en-US"/>
           </a:p>
@@ -3237,7 +3237,7 @@
           <a:p>
             <a:fld id="{5BCAD085-E8A6-8845-BD4E-CB4CCA059FC4}" type="datetimeFigureOut">
               <a:rPr lang="en-US" smtClean="0"/>
-              <a:t>6/19/26</a:t>
+              <a:t>7/1/26</a:t>
             </a:fld>
             <a:endParaRPr lang="en-US"/>
           </a:p>
@@ -6820,7 +6820,7 @@
           <p:nvPr>
             <p:extLst>
               <p:ext uri="{D42A27DB-BD31-4B8C-83A1-F6EECF244321}">
-                <p14:modId xmlns:p14="http://schemas.microsoft.com/office/powerpoint/2010/main" val="1015901892"/>
+                <p14:modId xmlns:p14="http://schemas.microsoft.com/office/powerpoint/2010/main" val="3640292002"/>
               </p:ext>
             </p:extLst>
           </p:nvPr>
@@ -6941,7 +6941,7 @@
                           </a:solidFill>
                           <a:latin typeface="Calibri"/>
                         </a:rPr>
-                        <a:t>2</a:t>
+                        <a:t>3 </a:t>
                       </a:r>
                       <a:r>
                         <a:rPr sz="760" b="0" dirty="0">
@@ -7060,13 +7060,22 @@
                     <a:p>
                       <a:pPr algn="r"/>
                       <a:r>
-                        <a:rPr sz="760" b="0">
+                        <a:rPr lang="en-US" sz="760" b="0" dirty="0">
                           <a:solidFill>
                             <a:srgbClr val="1A1A1A"/>
                           </a:solidFill>
                           <a:latin typeface="Calibri"/>
                         </a:rPr>
-                        <a:t>2 / 4</a:t>
+                        <a:t>3</a:t>
+                      </a:r>
+                      <a:r>
+                        <a:rPr sz="760" b="0" dirty="0">
+                          <a:solidFill>
+                            <a:srgbClr val="1A1A1A"/>
+                          </a:solidFill>
+                          <a:latin typeface="Calibri"/>
+                        </a:rPr>
+                        <a:t> / 4</a:t>
                       </a:r>
                     </a:p>
                   </a:txBody>
@@ -7175,7 +7184,7 @@
                           </a:solidFill>
                           <a:latin typeface="Calibri"/>
                         </a:rPr>
-                        <a:t>2.6</a:t>
+                        <a:t>3.0</a:t>
                       </a:r>
                       <a:r>
                         <a:rPr sz="760" b="1" dirty="0">
